--- a/report/Survival_Analysis_of_Colorectal_V2.pptx
+++ b/report/Survival_Analysis_of_Colorectal_V2.pptx
@@ -5,7 +5,7 @@
     <p:sldMasterId id="2147483648" r:id="rId1"/>
   </p:sldMasterIdLst>
   <p:notesMasterIdLst>
-    <p:notesMasterId r:id="rId26"/>
+    <p:notesMasterId r:id="rId29"/>
   </p:notesMasterIdLst>
   <p:sldIdLst>
     <p:sldId id="256" r:id="rId2"/>
@@ -27,11 +27,14 @@
     <p:sldId id="274" r:id="rId18"/>
     <p:sldId id="275" r:id="rId19"/>
     <p:sldId id="276" r:id="rId20"/>
-    <p:sldId id="280" r:id="rId21"/>
-    <p:sldId id="277" r:id="rId22"/>
-    <p:sldId id="281" r:id="rId23"/>
-    <p:sldId id="278" r:id="rId24"/>
-    <p:sldId id="279" r:id="rId25"/>
+    <p:sldId id="282" r:id="rId21"/>
+    <p:sldId id="280" r:id="rId22"/>
+    <p:sldId id="277" r:id="rId23"/>
+    <p:sldId id="281" r:id="rId24"/>
+    <p:sldId id="283" r:id="rId25"/>
+    <p:sldId id="284" r:id="rId26"/>
+    <p:sldId id="278" r:id="rId27"/>
+    <p:sldId id="279" r:id="rId28"/>
   </p:sldIdLst>
   <p:sldSz cx="9144000" cy="5143500" type="screen16x9"/>
   <p:notesSz cx="5143500" cy="9144000"/>
@@ -2143,18 +2146,7 @@
                 <a:ea typeface="Calibri" pitchFamily="34" charset="-122"/>
                 <a:cs typeface="Calibri" pitchFamily="34" charset="-120"/>
               </a:rPr>
-              <a:t>Survival Analysis </a:t>
-            </a:r>
-            <a:r>
-              <a:rPr lang="en-US" sz="3600" b="1">
-                <a:solidFill>
-                  <a:srgbClr val="FFFFFF"/>
-                </a:solidFill>
-                <a:latin typeface="Calibri" pitchFamily="34" charset="0"/>
-                <a:ea typeface="Calibri" pitchFamily="34" charset="-122"/>
-                <a:cs typeface="Calibri" pitchFamily="34" charset="-120"/>
-              </a:rPr>
-              <a:t>of Colorectal</a:t>
+              <a:t>Survival Analysis of Colorectal</a:t>
             </a:r>
             <a:endParaRPr lang="en-US" sz="3600" dirty="0"/>
           </a:p>
@@ -6412,6 +6404,199 @@
 
 <file path=ppt/slides/slide20.xml><?xml version="1.0" encoding="utf-8"?>
 <p:sld xmlns:a="http://schemas.openxmlformats.org/drawingml/2006/main" xmlns:r="http://schemas.openxmlformats.org/officeDocument/2006/relationships" xmlns:p="http://schemas.openxmlformats.org/presentationml/2006/main">
+  <p:cSld name="Stage gradient">
+    <p:bg>
+      <p:bgPr>
+        <a:solidFill>
+          <a:srgbClr val="F1F3F4"/>
+        </a:solidFill>
+        <a:effectLst/>
+      </p:bgPr>
+    </p:bg>
+    <p:spTree>
+      <p:nvGrpSpPr>
+        <p:cNvPr id="1" name=""/>
+        <p:cNvGrpSpPr/>
+        <p:nvPr/>
+      </p:nvGrpSpPr>
+      <p:grpSpPr>
+        <a:xfrm>
+          <a:off x="0" y="0"/>
+          <a:ext cx="0" cy="0"/>
+          <a:chOff x="0" y="0"/>
+          <a:chExt cx="0" cy="0"/>
+        </a:xfrm>
+      </p:grpSpPr>
+      <p:sp>
+        <p:nvSpPr>
+          <p:cNvPr id="2" name="Title"/>
+          <p:cNvSpPr/>
+          <p:nvPr/>
+        </p:nvSpPr>
+        <p:spPr>
+          <a:xfrm>
+            <a:off x="457200" y="228600"/>
+            <a:ext cx="8229600" cy="502920"/>
+          </a:xfrm>
+          <a:prstGeom prst="rect">
+            <a:avLst/>
+          </a:prstGeom>
+          <a:noFill/>
+          <a:ln/>
+        </p:spPr>
+        <p:txBody>
+          <a:bodyPr wrap="square" rtlCol="0" anchor="ctr"/>
+          <a:lstStyle/>
+          <a:p>
+            <a:pPr marL="0" indent="0" algn="l">
+              <a:buNone/>
+            </a:pPr>
+            <a:r>
+              <a:rPr lang="en-US" sz="2600" b="1" dirty="0">
+                <a:solidFill>
+                  <a:srgbClr val="0D1B2A"/>
+                </a:solidFill>
+                <a:latin typeface="Calibri" pitchFamily="34" charset="0"/>
+                <a:ea typeface="Calibri" pitchFamily="34" charset="-122"/>
+                <a:cs typeface="Calibri" pitchFamily="34" charset="-120"/>
+              </a:rPr>
+              <a:t>Adjusted Comparison: The Full Model</a:t>
+            </a:r>
+          </a:p>
+        </p:txBody>
+      </p:sp>
+      <p:pic>
+        <p:nvPicPr>
+          <p:cNvPr id="3" name="Figure"/>
+          <p:cNvPicPr>
+            <a:picLocks noChangeAspect="1"/>
+          </p:cNvPicPr>
+          <p:nvPr/>
+        </p:nvPicPr>
+        <p:blipFill>
+          <a:blip r:embed="rId2"/>
+          <a:stretch>
+            <a:fillRect/>
+          </a:stretch>
+        </p:blipFill>
+        <p:spPr>
+          <a:xfrm>
+            <a:off x="472000" y="1138523"/>
+            <a:ext cx="8200000" cy="2382953"/>
+          </a:xfrm>
+          <a:prstGeom prst="rect">
+            <a:avLst/>
+          </a:prstGeom>
+        </p:spPr>
+      </p:pic>
+      <p:sp>
+        <p:nvSpPr>
+          <p:cNvPr id="4" name="Accent"/>
+          <p:cNvSpPr/>
+          <p:nvPr/>
+        </p:nvSpPr>
+        <p:spPr>
+          <a:xfrm>
+            <a:off x="274320" y="3910000"/>
+            <a:ext cx="109728" cy="470000"/>
+          </a:xfrm>
+          <a:prstGeom prst="rect">
+            <a:avLst/>
+          </a:prstGeom>
+          <a:solidFill>
+            <a:srgbClr val="1E6091"/>
+          </a:solidFill>
+        </p:spPr>
+        <p:txBody>
+          <a:bodyPr/>
+          <a:lstStyle/>
+          <a:p>
+            <a:endParaRPr lang="en-GB"/>
+          </a:p>
+        </p:txBody>
+      </p:sp>
+      <p:sp>
+        <p:nvSpPr>
+          <p:cNvPr id="5" name="Caption"/>
+          <p:cNvSpPr/>
+          <p:nvPr/>
+        </p:nvSpPr>
+        <p:spPr>
+          <a:xfrm>
+            <a:off x="470000" y="3910000"/>
+            <a:ext cx="8400000" cy="950000"/>
+          </a:xfrm>
+          <a:prstGeom prst="rect">
+            <a:avLst/>
+          </a:prstGeom>
+          <a:noFill/>
+          <a:ln/>
+        </p:spPr>
+        <p:txBody>
+          <a:bodyPr wrap="square" rtlCol="0" anchor="t"/>
+          <a:lstStyle/>
+          <a:p>
+            <a:pPr marL="0" indent="0" algn="l">
+              <a:buNone/>
+            </a:pPr>
+            <a:r>
+              <a:rPr lang="en-US" sz="1100" i="1" dirty="0">
+                <a:solidFill>
+                  <a:srgbClr val="5A6570"/>
+                </a:solidFill>
+                <a:latin typeface="Calibri" pitchFamily="34" charset="0"/>
+                <a:ea typeface="Calibri" pitchFamily="34" charset="-122"/>
+                <a:cs typeface="Calibri" pitchFamily="34" charset="-120"/>
+              </a:rPr>
+              <a:t>Pooling the cohorts and adjusting for age, stage and sex. Colon carries a hazard ratio of 0.36 against stomach (colorectal 0.33), so stomach is about three times worse stage-for-stage: the excess is intrinsic, not a consequence of later diagnosis. The stage gradient is steep (Stage IV HR 7.82) and age is significant; sex is not.</a:t>
+            </a:r>
+          </a:p>
+        </p:txBody>
+      </p:sp>
+      <p:sp>
+        <p:nvSpPr>
+          <p:cNvPr id="55" name="slidenum"/>
+          <p:cNvSpPr>
+            <a:spLocks noGrp="1"/>
+          </p:cNvSpPr>
+          <p:nvPr/>
+        </p:nvSpPr>
+        <p:spPr>
+          <a:xfrm>
+            <a:off x="8469680" y="4790000"/>
+            <a:ext cx="400000" cy="230000"/>
+          </a:xfrm>
+          <a:prstGeom prst="rect">
+            <a:avLst/>
+          </a:prstGeom>
+          <a:noFill/>
+        </p:spPr>
+        <p:txBody>
+          <a:bodyPr wrap="none" lIns="0" tIns="0" rIns="0" bIns="0" anchor="ctr"/>
+          <a:lstStyle/>
+          <a:p>
+            <a:pPr algn="r"/>
+            <a:r>
+              <a:rPr lang="en-US" sz="1000" b="0">
+                <a:solidFill>
+                  <a:srgbClr val="808080"/>
+                </a:solidFill>
+              </a:rPr>
+              <a:t>20</a:t>
+            </a:r>
+          </a:p>
+        </p:txBody>
+      </p:sp>
+    </p:spTree>
+  </p:cSld>
+  <p:clrMapOvr>
+    <a:masterClrMapping/>
+  </p:clrMapOvr>
+</p:sld>
+</file>
+
+<file path=ppt/slides/slide21.xml><?xml version="1.0" encoding="utf-8"?>
+<p:sld xmlns:a="http://schemas.openxmlformats.org/drawingml/2006/main" xmlns:r="http://schemas.openxmlformats.org/officeDocument/2006/relationships" xmlns:p="http://schemas.openxmlformats.org/presentationml/2006/main">
   <p:cSld name="Cox HR">
     <p:bg>
       <p:bgPr>
@@ -6590,7 +6775,7 @@
                   <a:srgbClr val="808080"/>
                 </a:solidFill>
               </a:rPr>
-              <a:t>20</a:t>
+              <a:t>21</a:t>
             </a:r>
           </a:p>
         </p:txBody>
@@ -6603,7 +6788,7 @@
 </p:sld>
 </file>
 
-<file path=ppt/slides/slide21.xml><?xml version="1.0" encoding="utf-8"?>
+<file path=ppt/slides/slide22.xml><?xml version="1.0" encoding="utf-8"?>
 <p:sld xmlns:a="http://schemas.openxmlformats.org/drawingml/2006/main" xmlns:r="http://schemas.openxmlformats.org/officeDocument/2006/relationships" xmlns:p="http://schemas.openxmlformats.org/presentationml/2006/main">
   <p:cSld name="Stage gradient">
     <p:bg>
@@ -6783,7 +6968,7 @@
                   <a:srgbClr val="808080"/>
                 </a:solidFill>
               </a:rPr>
-              <a:t>21</a:t>
+              <a:t>22</a:t>
             </a:r>
           </a:p>
         </p:txBody>
@@ -6796,7 +6981,7 @@
 </p:sld>
 </file>
 
-<file path=ppt/slides/slide22.xml><?xml version="1.0" encoding="utf-8"?>
+<file path=ppt/slides/slide23.xml><?xml version="1.0" encoding="utf-8"?>
 <p:sld xmlns:a="http://schemas.openxmlformats.org/drawingml/2006/main" xmlns:r="http://schemas.openxmlformats.org/officeDocument/2006/relationships" xmlns:p="http://schemas.openxmlformats.org/presentationml/2006/main">
   <p:cSld name="Cox HR">
     <p:bg>
@@ -6976,7 +7161,7 @@
                   <a:srgbClr val="808080"/>
                 </a:solidFill>
               </a:rPr>
-              <a:t>22</a:t>
+              <a:t>23</a:t>
             </a:r>
           </a:p>
         </p:txBody>
@@ -6989,7 +7174,7 @@
 </p:sld>
 </file>
 
-<file path=ppt/slides/slide23.xml><?xml version="1.0" encoding="utf-8"?>
+<file path=ppt/slides/slide24.xml><?xml version="1.0" encoding="utf-8"?>
 <p:sld xmlns:a="http://schemas.openxmlformats.org/drawingml/2006/main" xmlns:r="http://schemas.openxmlformats.org/officeDocument/2006/relationships" xmlns:p="http://schemas.openxmlformats.org/presentationml/2006/main">
   <p:cSld name="Stage gradient">
     <p:bg>
@@ -7047,7 +7232,7 @@
                 <a:ea typeface="Calibri" pitchFamily="34" charset="-122"/>
                 <a:cs typeface="Calibri" pitchFamily="34" charset="-120"/>
               </a:rPr>
-              <a:t>The Same Predictors Drive Both Cancers</a:t>
+              <a:t>ROC-AUC of the Transferred Model</a:t>
             </a:r>
           </a:p>
         </p:txBody>
@@ -7068,8 +7253,8 @@
         </p:blipFill>
         <p:spPr>
           <a:xfrm>
-            <a:off x="2223600" y="820000"/>
-            <a:ext cx="4696800" cy="2850000"/>
+            <a:off x="1206000" y="800000"/>
+            <a:ext cx="6732000" cy="3060000"/>
           </a:xfrm>
           <a:prstGeom prst="rect">
             <a:avLst/>
@@ -7084,7 +7269,7 @@
         </p:nvSpPr>
         <p:spPr>
           <a:xfrm>
-            <a:off x="274320" y="3830000"/>
+            <a:off x="274320" y="3910000"/>
             <a:ext cx="109728" cy="470000"/>
           </a:xfrm>
           <a:prstGeom prst="rect">
@@ -7110,8 +7295,8 @@
         </p:nvSpPr>
         <p:spPr>
           <a:xfrm>
-            <a:off x="470000" y="3830000"/>
-            <a:ext cx="7850000" cy="1250000"/>
+            <a:off x="470000" y="3910000"/>
+            <a:ext cx="8400000" cy="950000"/>
           </a:xfrm>
           <a:prstGeom prst="rect">
             <a:avLst/>
@@ -7135,7 +7320,7 @@
                 <a:ea typeface="Calibri" pitchFamily="34" charset="-122"/>
                 <a:cs typeface="Calibri" pitchFamily="34" charset="-120"/>
               </a:rPr>
-              <a:t>Testing each predictor for a different effect in colorectal versus stomach, none differs significantly. Age, stage and residual disease raise risk the same way in both, and sex is null in both. Because the predictors are invariant across the cancers, a model learned on colorectal generalises to stomach, which is exactly why the transfer works. Prior GI studies report the same shared prognostic structure across related cohorts, so this doubles as external validation (Saegusa et al., 2021; Zhou et al., 2023).</a:t>
+              <a:t>Time-dependent ROC, inverse-probability-of-censoring weighted: the survival equivalent of a classification ROC, since a plain ROC is invalid under censoring. Left: the colorectal-trained forest on stomach at one, two and three years (AUC 0.658, 0.674, 0.678), consistent with the mean time-dependent AUC of 0.671. Right: at two years a Cox transfer (0.661) and a stomach-trained forest (0.658) land on the same curve.</a:t>
             </a:r>
           </a:p>
         </p:txBody>
@@ -7169,7 +7354,7 @@
                   <a:srgbClr val="808080"/>
                 </a:solidFill>
               </a:rPr>
-              <a:t>23</a:t>
+              <a:t>24</a:t>
             </a:r>
           </a:p>
         </p:txBody>
@@ -7182,7 +7367,393 @@
 </p:sld>
 </file>
 
-<file path=ppt/slides/slide24.xml><?xml version="1.0" encoding="utf-8"?>
+<file path=ppt/slides/slide25.xml><?xml version="1.0" encoding="utf-8"?>
+<p:sld xmlns:a="http://schemas.openxmlformats.org/drawingml/2006/main" xmlns:r="http://schemas.openxmlformats.org/officeDocument/2006/relationships" xmlns:p="http://schemas.openxmlformats.org/presentationml/2006/main">
+  <p:cSld name="Stage gradient">
+    <p:bg>
+      <p:bgPr>
+        <a:solidFill>
+          <a:srgbClr val="F1F3F4"/>
+        </a:solidFill>
+        <a:effectLst/>
+      </p:bgPr>
+    </p:bg>
+    <p:spTree>
+      <p:nvGrpSpPr>
+        <p:cNvPr id="1" name=""/>
+        <p:cNvGrpSpPr/>
+        <p:nvPr/>
+      </p:nvGrpSpPr>
+      <p:grpSpPr>
+        <a:xfrm>
+          <a:off x="0" y="0"/>
+          <a:ext cx="0" cy="0"/>
+          <a:chOff x="0" y="0"/>
+          <a:chExt cx="0" cy="0"/>
+        </a:xfrm>
+      </p:grpSpPr>
+      <p:sp>
+        <p:nvSpPr>
+          <p:cNvPr id="2" name="Title"/>
+          <p:cNvSpPr/>
+          <p:nvPr/>
+        </p:nvSpPr>
+        <p:spPr>
+          <a:xfrm>
+            <a:off x="457200" y="228600"/>
+            <a:ext cx="8229600" cy="502920"/>
+          </a:xfrm>
+          <a:prstGeom prst="rect">
+            <a:avLst/>
+          </a:prstGeom>
+          <a:noFill/>
+          <a:ln/>
+        </p:spPr>
+        <p:txBody>
+          <a:bodyPr wrap="square" rtlCol="0" anchor="ctr"/>
+          <a:lstStyle/>
+          <a:p>
+            <a:pPr marL="0" indent="0" algn="l">
+              <a:buNone/>
+            </a:pPr>
+            <a:r>
+              <a:rPr lang="en-US" sz="2600" b="1" dirty="0">
+                <a:solidFill>
+                  <a:srgbClr val="0D1B2A"/>
+                </a:solidFill>
+                <a:latin typeface="Calibri" pitchFamily="34" charset="0"/>
+                <a:ea typeface="Calibri" pitchFamily="34" charset="-122"/>
+                <a:cs typeface="Calibri" pitchFamily="34" charset="-120"/>
+              </a:rPr>
+              <a:t>Transfer Reaches the Ceiling in Both Directions</a:t>
+            </a:r>
+          </a:p>
+        </p:txBody>
+      </p:sp>
+      <p:pic>
+        <p:nvPicPr>
+          <p:cNvPr id="3" name="Figure"/>
+          <p:cNvPicPr>
+            <a:picLocks noChangeAspect="1"/>
+          </p:cNvPicPr>
+          <p:nvPr/>
+        </p:nvPicPr>
+        <p:blipFill>
+          <a:blip r:embed="rId2"/>
+          <a:stretch>
+            <a:fillRect/>
+          </a:stretch>
+        </p:blipFill>
+        <p:spPr>
+          <a:xfrm>
+            <a:off x="1273096" y="800000"/>
+            <a:ext cx="6597807" cy="3060000"/>
+          </a:xfrm>
+          <a:prstGeom prst="rect">
+            <a:avLst/>
+          </a:prstGeom>
+        </p:spPr>
+      </p:pic>
+      <p:sp>
+        <p:nvSpPr>
+          <p:cNvPr id="4" name="Accent"/>
+          <p:cNvSpPr/>
+          <p:nvPr/>
+        </p:nvSpPr>
+        <p:spPr>
+          <a:xfrm>
+            <a:off x="274320" y="3910000"/>
+            <a:ext cx="109728" cy="470000"/>
+          </a:xfrm>
+          <a:prstGeom prst="rect">
+            <a:avLst/>
+          </a:prstGeom>
+          <a:solidFill>
+            <a:srgbClr val="1E6091"/>
+          </a:solidFill>
+        </p:spPr>
+        <p:txBody>
+          <a:bodyPr/>
+          <a:lstStyle/>
+          <a:p>
+            <a:endParaRPr lang="en-GB"/>
+          </a:p>
+        </p:txBody>
+      </p:sp>
+      <p:sp>
+        <p:nvSpPr>
+          <p:cNvPr id="5" name="Caption"/>
+          <p:cNvSpPr/>
+          <p:nvPr/>
+        </p:nvSpPr>
+        <p:spPr>
+          <a:xfrm>
+            <a:off x="470000" y="3910000"/>
+            <a:ext cx="8400000" cy="950000"/>
+          </a:xfrm>
+          <a:prstGeom prst="rect">
+            <a:avLst/>
+          </a:prstGeom>
+          <a:noFill/>
+          <a:ln/>
+        </p:spPr>
+        <p:txBody>
+          <a:bodyPr wrap="square" rtlCol="0" anchor="t"/>
+          <a:lstStyle/>
+          <a:p>
+            <a:pPr marL="0" indent="0" algn="l">
+              <a:buNone/>
+            </a:pPr>
+            <a:r>
+              <a:rPr lang="en-US" sz="1100" i="1" dirty="0">
+                <a:solidFill>
+                  <a:srgbClr val="5A6570"/>
+                </a:solidFill>
+                <a:latin typeface="Calibri" pitchFamily="34" charset="0"/>
+                <a:ea typeface="Calibri" pitchFamily="34" charset="-122"/>
+                <a:cs typeface="Calibri" pitchFamily="34" charset="-120"/>
+              </a:rPr>
+              <a:t>Each transfer is judged against its own target's within-cohort ceiling, because the C-index is not comparable between cohorts. On stomach, the colorectal-trained forest scores 0.646 against a 0.648 ceiling; on colorectal, a stomach-trained forest scores 0.763 against a 0.760 ceiling. Both reach 100%: a model trained on one gastrointestinal cancer ranks patients in the other as well as a model trained on that cancer itself.</a:t>
+            </a:r>
+          </a:p>
+        </p:txBody>
+      </p:sp>
+      <p:sp>
+        <p:nvSpPr>
+          <p:cNvPr id="55" name="slidenum"/>
+          <p:cNvSpPr>
+            <a:spLocks noGrp="1"/>
+          </p:cNvSpPr>
+          <p:nvPr/>
+        </p:nvSpPr>
+        <p:spPr>
+          <a:xfrm>
+            <a:off x="8469680" y="4790000"/>
+            <a:ext cx="400000" cy="230000"/>
+          </a:xfrm>
+          <a:prstGeom prst="rect">
+            <a:avLst/>
+          </a:prstGeom>
+          <a:noFill/>
+        </p:spPr>
+        <p:txBody>
+          <a:bodyPr wrap="none" lIns="0" tIns="0" rIns="0" bIns="0" anchor="ctr"/>
+          <a:lstStyle/>
+          <a:p>
+            <a:pPr algn="r"/>
+            <a:r>
+              <a:rPr lang="en-US" sz="1000" b="0">
+                <a:solidFill>
+                  <a:srgbClr val="808080"/>
+                </a:solidFill>
+              </a:rPr>
+              <a:t>25</a:t>
+            </a:r>
+          </a:p>
+        </p:txBody>
+      </p:sp>
+    </p:spTree>
+  </p:cSld>
+  <p:clrMapOvr>
+    <a:masterClrMapping/>
+  </p:clrMapOvr>
+</p:sld>
+</file>
+
+<file path=ppt/slides/slide26.xml><?xml version="1.0" encoding="utf-8"?>
+<p:sld xmlns:a="http://schemas.openxmlformats.org/drawingml/2006/main" xmlns:r="http://schemas.openxmlformats.org/officeDocument/2006/relationships" xmlns:p="http://schemas.openxmlformats.org/presentationml/2006/main">
+  <p:cSld name="Stage gradient">
+    <p:bg>
+      <p:bgPr>
+        <a:solidFill>
+          <a:srgbClr val="F1F3F4"/>
+        </a:solidFill>
+        <a:effectLst/>
+      </p:bgPr>
+    </p:bg>
+    <p:spTree>
+      <p:nvGrpSpPr>
+        <p:cNvPr id="1" name=""/>
+        <p:cNvGrpSpPr/>
+        <p:nvPr/>
+      </p:nvGrpSpPr>
+      <p:grpSpPr>
+        <a:xfrm>
+          <a:off x="0" y="0"/>
+          <a:ext cx="0" cy="0"/>
+          <a:chOff x="0" y="0"/>
+          <a:chExt cx="0" cy="0"/>
+        </a:xfrm>
+      </p:grpSpPr>
+      <p:sp>
+        <p:nvSpPr>
+          <p:cNvPr id="2" name="Title"/>
+          <p:cNvSpPr/>
+          <p:nvPr/>
+        </p:nvSpPr>
+        <p:spPr>
+          <a:xfrm>
+            <a:off x="457200" y="228600"/>
+            <a:ext cx="8229600" cy="502920"/>
+          </a:xfrm>
+          <a:prstGeom prst="rect">
+            <a:avLst/>
+          </a:prstGeom>
+          <a:noFill/>
+          <a:ln/>
+        </p:spPr>
+        <p:txBody>
+          <a:bodyPr wrap="square" rtlCol="0" anchor="ctr"/>
+          <a:lstStyle/>
+          <a:p>
+            <a:pPr marL="0" indent="0" algn="l">
+              <a:buNone/>
+            </a:pPr>
+            <a:r>
+              <a:rPr lang="en-US" sz="2600" b="1" dirty="0">
+                <a:solidFill>
+                  <a:srgbClr val="0D1B2A"/>
+                </a:solidFill>
+                <a:latin typeface="Calibri" pitchFamily="34" charset="0"/>
+                <a:ea typeface="Calibri" pitchFamily="34" charset="-122"/>
+                <a:cs typeface="Calibri" pitchFamily="34" charset="-120"/>
+              </a:rPr>
+              <a:t>The Same Predictors Drive Both Cancers</a:t>
+            </a:r>
+          </a:p>
+        </p:txBody>
+      </p:sp>
+      <p:pic>
+        <p:nvPicPr>
+          <p:cNvPr id="3" name="Figure"/>
+          <p:cNvPicPr>
+            <a:picLocks noChangeAspect="1"/>
+          </p:cNvPicPr>
+          <p:nvPr/>
+        </p:nvPicPr>
+        <p:blipFill>
+          <a:blip r:embed="rId2"/>
+          <a:stretch>
+            <a:fillRect/>
+          </a:stretch>
+        </p:blipFill>
+        <p:spPr>
+          <a:xfrm>
+            <a:off x="2223600" y="820000"/>
+            <a:ext cx="4696800" cy="2850000"/>
+          </a:xfrm>
+          <a:prstGeom prst="rect">
+            <a:avLst/>
+          </a:prstGeom>
+        </p:spPr>
+      </p:pic>
+      <p:sp>
+        <p:nvSpPr>
+          <p:cNvPr id="4" name="Accent"/>
+          <p:cNvSpPr/>
+          <p:nvPr/>
+        </p:nvSpPr>
+        <p:spPr>
+          <a:xfrm>
+            <a:off x="274320" y="3830000"/>
+            <a:ext cx="109728" cy="470000"/>
+          </a:xfrm>
+          <a:prstGeom prst="rect">
+            <a:avLst/>
+          </a:prstGeom>
+          <a:solidFill>
+            <a:srgbClr val="1E6091"/>
+          </a:solidFill>
+        </p:spPr>
+        <p:txBody>
+          <a:bodyPr/>
+          <a:lstStyle/>
+          <a:p>
+            <a:endParaRPr lang="en-GB"/>
+          </a:p>
+        </p:txBody>
+      </p:sp>
+      <p:sp>
+        <p:nvSpPr>
+          <p:cNvPr id="5" name="Caption"/>
+          <p:cNvSpPr/>
+          <p:nvPr/>
+        </p:nvSpPr>
+        <p:spPr>
+          <a:xfrm>
+            <a:off x="470000" y="3830000"/>
+            <a:ext cx="7850000" cy="1250000"/>
+          </a:xfrm>
+          <a:prstGeom prst="rect">
+            <a:avLst/>
+          </a:prstGeom>
+          <a:noFill/>
+          <a:ln/>
+        </p:spPr>
+        <p:txBody>
+          <a:bodyPr wrap="square" rtlCol="0" anchor="t"/>
+          <a:lstStyle/>
+          <a:p>
+            <a:pPr marL="0" indent="0" algn="l">
+              <a:buNone/>
+            </a:pPr>
+            <a:r>
+              <a:rPr lang="en-US" sz="1100" i="1" dirty="0">
+                <a:solidFill>
+                  <a:srgbClr val="5A6570"/>
+                </a:solidFill>
+                <a:latin typeface="Calibri" pitchFamily="34" charset="0"/>
+                <a:ea typeface="Calibri" pitchFamily="34" charset="-122"/>
+                <a:cs typeface="Calibri" pitchFamily="34" charset="-120"/>
+              </a:rPr>
+              <a:t>Testing each predictor for a different effect in colorectal versus stomach, none differs significantly. Age, stage and residual disease raise risk the same way in both, and sex is null in both. Because the predictors are invariant across the cancers, a model learned on colorectal generalises to stomach, which is exactly why the transfer works. Prior GI studies report the same shared prognostic structure across related cohorts, so this doubles as external validation (Saegusa et al., 2021; Zhou et al., 2023).</a:t>
+            </a:r>
+          </a:p>
+        </p:txBody>
+      </p:sp>
+      <p:sp>
+        <p:nvSpPr>
+          <p:cNvPr id="55" name="slidenum"/>
+          <p:cNvSpPr>
+            <a:spLocks noGrp="1"/>
+          </p:cNvSpPr>
+          <p:nvPr/>
+        </p:nvSpPr>
+        <p:spPr>
+          <a:xfrm>
+            <a:off x="8469680" y="4790000"/>
+            <a:ext cx="400000" cy="230000"/>
+          </a:xfrm>
+          <a:prstGeom prst="rect">
+            <a:avLst/>
+          </a:prstGeom>
+          <a:noFill/>
+        </p:spPr>
+        <p:txBody>
+          <a:bodyPr wrap="none" lIns="0" tIns="0" rIns="0" bIns="0" anchor="ctr"/>
+          <a:lstStyle/>
+          <a:p>
+            <a:pPr algn="r"/>
+            <a:r>
+              <a:rPr lang="en-US" sz="1000" b="0">
+                <a:solidFill>
+                  <a:srgbClr val="808080"/>
+                </a:solidFill>
+              </a:rPr>
+              <a:t>26</a:t>
+            </a:r>
+          </a:p>
+        </p:txBody>
+      </p:sp>
+    </p:spTree>
+  </p:cSld>
+  <p:clrMapOvr>
+    <a:masterClrMapping/>
+  </p:clrMapOvr>
+</p:sld>
+</file>
+
+<file path=ppt/slides/slide27.xml><?xml version="1.0" encoding="utf-8"?>
 <p:sld xmlns:a="http://schemas.openxmlformats.org/drawingml/2006/main" xmlns:r="http://schemas.openxmlformats.org/officeDocument/2006/relationships" xmlns:p="http://schemas.openxmlformats.org/presentationml/2006/main">
   <p:cSld name="Slide 2">
     <p:bg>
@@ -7750,7 +8321,7 @@
                   <a:srgbClr val="808080"/>
                 </a:solidFill>
               </a:rPr>
-              <a:t>24</a:t>
+              <a:t>27</a:t>
             </a:r>
           </a:p>
         </p:txBody>
